--- a/AUTOCAD INTECAP/apuntes powerpoint/Lunes 3 Marzo.pptx
+++ b/AUTOCAD INTECAP/apuntes powerpoint/Lunes 3 Marzo.pptx
@@ -130,6 +130,11 @@
       </a:defRPr>
     </a:lvl9pPr>
   </p:defaultTextStyle>
+  <p:extLst>
+    <p:ext uri="{EFAFB233-063F-42B5-8137-9DF3F51BA10A}">
+      <p15:sldGuideLst xmlns:p15="http://schemas.microsoft.com/office/powerpoint/2012/main"/>
+    </p:ext>
+  </p:extLst>
 </p:presentation>
 </file>
 
@@ -688,7 +693,7 @@
           <a:p>
             <a:fld id="{6CEA2BFC-48E5-496F-8226-75A10A6E18AD}" type="datetimeFigureOut">
               <a:rPr lang="es-GT" smtClean="0"/>
-              <a:t>2/03/2026</a:t>
+              <a:t>8/03/2026</a:t>
             </a:fld>
             <a:endParaRPr lang="es-GT"/>
           </a:p>
@@ -888,7 +893,7 @@
           <a:p>
             <a:fld id="{6CEA2BFC-48E5-496F-8226-75A10A6E18AD}" type="datetimeFigureOut">
               <a:rPr lang="es-GT" smtClean="0"/>
-              <a:t>2/03/2026</a:t>
+              <a:t>8/03/2026</a:t>
             </a:fld>
             <a:endParaRPr lang="es-GT"/>
           </a:p>
@@ -1098,7 +1103,7 @@
           <a:p>
             <a:fld id="{6CEA2BFC-48E5-496F-8226-75A10A6E18AD}" type="datetimeFigureOut">
               <a:rPr lang="es-GT" smtClean="0"/>
-              <a:t>2/03/2026</a:t>
+              <a:t>8/03/2026</a:t>
             </a:fld>
             <a:endParaRPr lang="es-GT"/>
           </a:p>
@@ -1298,7 +1303,7 @@
           <a:p>
             <a:fld id="{6CEA2BFC-48E5-496F-8226-75A10A6E18AD}" type="datetimeFigureOut">
               <a:rPr lang="es-GT" smtClean="0"/>
-              <a:t>2/03/2026</a:t>
+              <a:t>8/03/2026</a:t>
             </a:fld>
             <a:endParaRPr lang="es-GT"/>
           </a:p>
@@ -1574,7 +1579,7 @@
           <a:p>
             <a:fld id="{6CEA2BFC-48E5-496F-8226-75A10A6E18AD}" type="datetimeFigureOut">
               <a:rPr lang="es-GT" smtClean="0"/>
-              <a:t>2/03/2026</a:t>
+              <a:t>8/03/2026</a:t>
             </a:fld>
             <a:endParaRPr lang="es-GT"/>
           </a:p>
@@ -1842,7 +1847,7 @@
           <a:p>
             <a:fld id="{6CEA2BFC-48E5-496F-8226-75A10A6E18AD}" type="datetimeFigureOut">
               <a:rPr lang="es-GT" smtClean="0"/>
-              <a:t>2/03/2026</a:t>
+              <a:t>8/03/2026</a:t>
             </a:fld>
             <a:endParaRPr lang="es-GT"/>
           </a:p>
@@ -2257,7 +2262,7 @@
           <a:p>
             <a:fld id="{6CEA2BFC-48E5-496F-8226-75A10A6E18AD}" type="datetimeFigureOut">
               <a:rPr lang="es-GT" smtClean="0"/>
-              <a:t>2/03/2026</a:t>
+              <a:t>8/03/2026</a:t>
             </a:fld>
             <a:endParaRPr lang="es-GT"/>
           </a:p>
@@ -2399,7 +2404,7 @@
           <a:p>
             <a:fld id="{6CEA2BFC-48E5-496F-8226-75A10A6E18AD}" type="datetimeFigureOut">
               <a:rPr lang="es-GT" smtClean="0"/>
-              <a:t>2/03/2026</a:t>
+              <a:t>8/03/2026</a:t>
             </a:fld>
             <a:endParaRPr lang="es-GT"/>
           </a:p>
@@ -2512,7 +2517,7 @@
           <a:p>
             <a:fld id="{6CEA2BFC-48E5-496F-8226-75A10A6E18AD}" type="datetimeFigureOut">
               <a:rPr lang="es-GT" smtClean="0"/>
-              <a:t>2/03/2026</a:t>
+              <a:t>8/03/2026</a:t>
             </a:fld>
             <a:endParaRPr lang="es-GT"/>
           </a:p>
@@ -2825,7 +2830,7 @@
           <a:p>
             <a:fld id="{6CEA2BFC-48E5-496F-8226-75A10A6E18AD}" type="datetimeFigureOut">
               <a:rPr lang="es-GT" smtClean="0"/>
-              <a:t>2/03/2026</a:t>
+              <a:t>8/03/2026</a:t>
             </a:fld>
             <a:endParaRPr lang="es-GT"/>
           </a:p>
@@ -3114,7 +3119,7 @@
           <a:p>
             <a:fld id="{6CEA2BFC-48E5-496F-8226-75A10A6E18AD}" type="datetimeFigureOut">
               <a:rPr lang="es-GT" smtClean="0"/>
-              <a:t>2/03/2026</a:t>
+              <a:t>8/03/2026</a:t>
             </a:fld>
             <a:endParaRPr lang="es-GT"/>
           </a:p>
@@ -3357,7 +3362,7 @@
           <a:p>
             <a:fld id="{6CEA2BFC-48E5-496F-8226-75A10A6E18AD}" type="datetimeFigureOut">
               <a:rPr lang="es-GT" smtClean="0"/>
-              <a:t>2/03/2026</a:t>
+              <a:t>8/03/2026</a:t>
             </a:fld>
             <a:endParaRPr lang="es-GT"/>
           </a:p>
@@ -3967,8 +3972,8 @@
           </a:prstGeom>
         </p:spPr>
       </p:pic>
-      <mc:AlternateContent xmlns:mc="http://schemas.openxmlformats.org/markup-compatibility/2006">
-        <mc:Choice xmlns:p14="http://schemas.microsoft.com/office/powerpoint/2010/main" Requires="p14">
+      <mc:AlternateContent xmlns:mc="http://schemas.openxmlformats.org/markup-compatibility/2006" xmlns:p14="http://schemas.microsoft.com/office/powerpoint/2010/main">
+        <mc:Choice Requires="p14">
           <p:contentPart p14:bwMode="auto" r:id="rId3">
             <p14:nvContentPartPr>
               <p14:cNvPr id="6" name="Entrada de lápiz 5">
@@ -3987,7 +3992,7 @@
             </p14:xfrm>
           </p:contentPart>
         </mc:Choice>
-        <mc:Fallback>
+        <mc:Fallback xmlns="">
           <p:pic>
             <p:nvPicPr>
               <p:cNvPr id="6" name="Entrada de lápiz 5">
@@ -4105,8 +4110,8 @@
           </a:prstGeom>
         </p:spPr>
       </p:pic>
-      <mc:AlternateContent xmlns:mc="http://schemas.openxmlformats.org/markup-compatibility/2006">
-        <mc:Choice xmlns:p14="http://schemas.microsoft.com/office/powerpoint/2010/main" Requires="p14">
+      <mc:AlternateContent xmlns:mc="http://schemas.openxmlformats.org/markup-compatibility/2006" xmlns:p14="http://schemas.microsoft.com/office/powerpoint/2010/main">
+        <mc:Choice Requires="p14">
           <p:contentPart p14:bwMode="auto" r:id="rId3">
             <p14:nvContentPartPr>
               <p14:cNvPr id="6" name="Entrada de lápiz 5">
@@ -4125,7 +4130,7 @@
             </p14:xfrm>
           </p:contentPart>
         </mc:Choice>
-        <mc:Fallback>
+        <mc:Fallback xmlns="">
           <p:pic>
             <p:nvPicPr>
               <p:cNvPr id="6" name="Entrada de lápiz 5">
@@ -4266,8 +4271,8 @@
           </a:prstGeom>
         </p:spPr>
       </p:pic>
-      <mc:AlternateContent xmlns:mc="http://schemas.openxmlformats.org/markup-compatibility/2006">
-        <mc:Choice xmlns:p14="http://schemas.microsoft.com/office/powerpoint/2010/main" Requires="p14">
+      <mc:AlternateContent xmlns:mc="http://schemas.openxmlformats.org/markup-compatibility/2006" xmlns:p14="http://schemas.microsoft.com/office/powerpoint/2010/main">
+        <mc:Choice Requires="p14">
           <p:contentPart p14:bwMode="auto" r:id="rId3">
             <p14:nvContentPartPr>
               <p14:cNvPr id="6" name="Entrada de lápiz 5">
@@ -4286,7 +4291,7 @@
             </p14:xfrm>
           </p:contentPart>
         </mc:Choice>
-        <mc:Fallback>
+        <mc:Fallback xmlns="">
           <p:pic>
             <p:nvPicPr>
               <p:cNvPr id="6" name="Entrada de lápiz 5">
@@ -4427,8 +4432,8 @@
           </a:prstGeom>
         </p:spPr>
       </p:pic>
-      <mc:AlternateContent xmlns:mc="http://schemas.openxmlformats.org/markup-compatibility/2006">
-        <mc:Choice xmlns:p14="http://schemas.microsoft.com/office/powerpoint/2010/main" Requires="p14">
+      <mc:AlternateContent xmlns:mc="http://schemas.openxmlformats.org/markup-compatibility/2006" xmlns:p14="http://schemas.microsoft.com/office/powerpoint/2010/main">
+        <mc:Choice Requires="p14">
           <p:contentPart p14:bwMode="auto" r:id="rId3">
             <p14:nvContentPartPr>
               <p14:cNvPr id="6" name="Entrada de lápiz 5">
@@ -4447,7 +4452,7 @@
             </p14:xfrm>
           </p:contentPart>
         </mc:Choice>
-        <mc:Fallback>
+        <mc:Fallback xmlns="">
           <p:pic>
             <p:nvPicPr>
               <p:cNvPr id="6" name="Entrada de lápiz 5">
@@ -4558,8 +4563,8 @@
           </a:p>
         </p:txBody>
       </p:sp>
-      <mc:AlternateContent xmlns:mc="http://schemas.openxmlformats.org/markup-compatibility/2006">
-        <mc:Choice xmlns:p14="http://schemas.microsoft.com/office/powerpoint/2010/main" Requires="p14">
+      <mc:AlternateContent xmlns:mc="http://schemas.openxmlformats.org/markup-compatibility/2006" xmlns:p14="http://schemas.microsoft.com/office/powerpoint/2010/main">
+        <mc:Choice Requires="p14">
           <p:contentPart p14:bwMode="auto" r:id="rId2">
             <p14:nvContentPartPr>
               <p14:cNvPr id="4" name="Entrada de lápiz 3">
@@ -4578,7 +4583,7 @@
             </p14:xfrm>
           </p:contentPart>
         </mc:Choice>
-        <mc:Fallback>
+        <mc:Fallback xmlns="">
           <p:pic>
             <p:nvPicPr>
               <p:cNvPr id="4" name="Entrada de lápiz 3">
@@ -4749,8 +4754,8 @@
           </a:prstGeom>
         </p:spPr>
       </p:pic>
-      <mc:AlternateContent xmlns:mc="http://schemas.openxmlformats.org/markup-compatibility/2006">
-        <mc:Choice xmlns:p14="http://schemas.microsoft.com/office/powerpoint/2010/main" Requires="p14">
+      <mc:AlternateContent xmlns:mc="http://schemas.openxmlformats.org/markup-compatibility/2006" xmlns:p14="http://schemas.microsoft.com/office/powerpoint/2010/main">
+        <mc:Choice Requires="p14">
           <p:contentPart p14:bwMode="auto" r:id="rId3">
             <p14:nvContentPartPr>
               <p14:cNvPr id="6" name="Entrada de lápiz 5">
@@ -4769,7 +4774,7 @@
             </p14:xfrm>
           </p:contentPart>
         </mc:Choice>
-        <mc:Fallback>
+        <mc:Fallback xmlns="">
           <p:pic>
             <p:nvPicPr>
               <p:cNvPr id="6" name="Entrada de lápiz 5">
@@ -4913,8 +4918,8 @@
           </a:prstGeom>
         </p:spPr>
       </p:pic>
-      <mc:AlternateContent xmlns:mc="http://schemas.openxmlformats.org/markup-compatibility/2006">
-        <mc:Choice xmlns:p14="http://schemas.microsoft.com/office/powerpoint/2010/main" Requires="p14">
+      <mc:AlternateContent xmlns:mc="http://schemas.openxmlformats.org/markup-compatibility/2006" xmlns:p14="http://schemas.microsoft.com/office/powerpoint/2010/main">
+        <mc:Choice Requires="p14">
           <p:contentPart p14:bwMode="auto" r:id="rId3">
             <p14:nvContentPartPr>
               <p14:cNvPr id="6" name="Entrada de lápiz 5">
@@ -4933,7 +4938,7 @@
             </p14:xfrm>
           </p:contentPart>
         </mc:Choice>
-        <mc:Fallback>
+        <mc:Fallback xmlns="">
           <p:pic>
             <p:nvPicPr>
               <p:cNvPr id="6" name="Entrada de lápiz 5">
@@ -4964,8 +4969,8 @@
           </p:pic>
         </mc:Fallback>
       </mc:AlternateContent>
-      <mc:AlternateContent xmlns:mc="http://schemas.openxmlformats.org/markup-compatibility/2006">
-        <mc:Choice xmlns:p14="http://schemas.microsoft.com/office/powerpoint/2010/main" Requires="p14">
+      <mc:AlternateContent xmlns:mc="http://schemas.openxmlformats.org/markup-compatibility/2006" xmlns:p14="http://schemas.microsoft.com/office/powerpoint/2010/main">
+        <mc:Choice Requires="p14">
           <p:contentPart p14:bwMode="auto" r:id="rId5">
             <p14:nvContentPartPr>
               <p14:cNvPr id="7" name="Entrada de lápiz 6">
@@ -4984,7 +4989,7 @@
             </p14:xfrm>
           </p:contentPart>
         </mc:Choice>
-        <mc:Fallback>
+        <mc:Fallback xmlns="">
           <p:pic>
             <p:nvPicPr>
               <p:cNvPr id="7" name="Entrada de lápiz 6">
@@ -5015,8 +5020,8 @@
           </p:pic>
         </mc:Fallback>
       </mc:AlternateContent>
-      <mc:AlternateContent xmlns:mc="http://schemas.openxmlformats.org/markup-compatibility/2006">
-        <mc:Choice xmlns:p14="http://schemas.microsoft.com/office/powerpoint/2010/main" Requires="p14">
+      <mc:AlternateContent xmlns:mc="http://schemas.openxmlformats.org/markup-compatibility/2006" xmlns:p14="http://schemas.microsoft.com/office/powerpoint/2010/main">
+        <mc:Choice Requires="p14">
           <p:contentPart p14:bwMode="auto" r:id="rId7">
             <p14:nvContentPartPr>
               <p14:cNvPr id="8" name="Entrada de lápiz 7">
@@ -5035,7 +5040,7 @@
             </p14:xfrm>
           </p:contentPart>
         </mc:Choice>
-        <mc:Fallback>
+        <mc:Fallback xmlns="">
           <p:pic>
             <p:nvPicPr>
               <p:cNvPr id="8" name="Entrada de lápiz 7">
@@ -5066,8 +5071,8 @@
           </p:pic>
         </mc:Fallback>
       </mc:AlternateContent>
-      <mc:AlternateContent xmlns:mc="http://schemas.openxmlformats.org/markup-compatibility/2006">
-        <mc:Choice xmlns:p14="http://schemas.microsoft.com/office/powerpoint/2010/main" Requires="p14">
+      <mc:AlternateContent xmlns:mc="http://schemas.openxmlformats.org/markup-compatibility/2006" xmlns:p14="http://schemas.microsoft.com/office/powerpoint/2010/main">
+        <mc:Choice Requires="p14">
           <p:contentPart p14:bwMode="auto" r:id="rId9">
             <p14:nvContentPartPr>
               <p14:cNvPr id="9" name="Entrada de lápiz 8">
@@ -5086,7 +5091,7 @@
             </p14:xfrm>
           </p:contentPart>
         </mc:Choice>
-        <mc:Fallback>
+        <mc:Fallback xmlns="">
           <p:pic>
             <p:nvPicPr>
               <p:cNvPr id="9" name="Entrada de lápiz 8">
@@ -6446,8 +6451,8 @@
           </a:prstGeom>
         </p:spPr>
       </p:pic>
-      <mc:AlternateContent xmlns:mc="http://schemas.openxmlformats.org/markup-compatibility/2006">
-        <mc:Choice xmlns:p14="http://schemas.microsoft.com/office/powerpoint/2010/main" Requires="p14">
+      <mc:AlternateContent xmlns:mc="http://schemas.openxmlformats.org/markup-compatibility/2006" xmlns:p14="http://schemas.microsoft.com/office/powerpoint/2010/main">
+        <mc:Choice Requires="p14">
           <p:contentPart p14:bwMode="auto" r:id="rId3">
             <p14:nvContentPartPr>
               <p14:cNvPr id="6" name="Entrada de lápiz 5">
@@ -6466,7 +6471,7 @@
             </p14:xfrm>
           </p:contentPart>
         </mc:Choice>
-        <mc:Fallback>
+        <mc:Fallback xmlns="">
           <p:pic>
             <p:nvPicPr>
               <p:cNvPr id="6" name="Entrada de lápiz 5">
@@ -6497,8 +6502,8 @@
           </p:pic>
         </mc:Fallback>
       </mc:AlternateContent>
-      <mc:AlternateContent xmlns:mc="http://schemas.openxmlformats.org/markup-compatibility/2006">
-        <mc:Choice xmlns:p14="http://schemas.microsoft.com/office/powerpoint/2010/main" Requires="p14">
+      <mc:AlternateContent xmlns:mc="http://schemas.openxmlformats.org/markup-compatibility/2006" xmlns:p14="http://schemas.microsoft.com/office/powerpoint/2010/main">
+        <mc:Choice Requires="p14">
           <p:contentPart p14:bwMode="auto" r:id="rId5">
             <p14:nvContentPartPr>
               <p14:cNvPr id="7" name="Entrada de lápiz 6">
@@ -6517,7 +6522,7 @@
             </p14:xfrm>
           </p:contentPart>
         </mc:Choice>
-        <mc:Fallback>
+        <mc:Fallback xmlns="">
           <p:pic>
             <p:nvPicPr>
               <p:cNvPr id="7" name="Entrada de lápiz 6">
@@ -6661,8 +6666,8 @@
           </a:prstGeom>
         </p:spPr>
       </p:pic>
-      <mc:AlternateContent xmlns:mc="http://schemas.openxmlformats.org/markup-compatibility/2006">
-        <mc:Choice xmlns:p14="http://schemas.microsoft.com/office/powerpoint/2010/main" Requires="p14">
+      <mc:AlternateContent xmlns:mc="http://schemas.openxmlformats.org/markup-compatibility/2006" xmlns:p14="http://schemas.microsoft.com/office/powerpoint/2010/main">
+        <mc:Choice Requires="p14">
           <p:contentPart p14:bwMode="auto" r:id="rId3">
             <p14:nvContentPartPr>
               <p14:cNvPr id="6" name="Entrada de lápiz 5">
@@ -6681,7 +6686,7 @@
             </p14:xfrm>
           </p:contentPart>
         </mc:Choice>
-        <mc:Fallback>
+        <mc:Fallback xmlns="">
           <p:pic>
             <p:nvPicPr>
               <p:cNvPr id="6" name="Entrada de lápiz 5">
@@ -6712,8 +6717,8 @@
           </p:pic>
         </mc:Fallback>
       </mc:AlternateContent>
-      <mc:AlternateContent xmlns:mc="http://schemas.openxmlformats.org/markup-compatibility/2006">
-        <mc:Choice xmlns:p14="http://schemas.microsoft.com/office/powerpoint/2010/main" Requires="p14">
+      <mc:AlternateContent xmlns:mc="http://schemas.openxmlformats.org/markup-compatibility/2006" xmlns:p14="http://schemas.microsoft.com/office/powerpoint/2010/main">
+        <mc:Choice Requires="p14">
           <p:contentPart p14:bwMode="auto" r:id="rId5">
             <p14:nvContentPartPr>
               <p14:cNvPr id="7" name="Entrada de lápiz 6">
@@ -6732,7 +6737,7 @@
             </p14:xfrm>
           </p:contentPart>
         </mc:Choice>
-        <mc:Fallback>
+        <mc:Fallback xmlns="">
           <p:pic>
             <p:nvPicPr>
               <p:cNvPr id="7" name="Entrada de lápiz 6">
